--- a/materials/pdf/original/DS14_Folien_Landkarte-der-Sprachen.pptx
+++ b/materials/pdf/original/DS14_Folien_Landkarte-der-Sprachen.pptx
@@ -123,12 +123,12 @@
   <p:extLst>
     <p:ext uri="{521415D9-36F7-43E2-AB2F-B90AF26B5E84}">
       <p14:sectionLst xmlns:p14="http://schemas.microsoft.com/office/powerpoint/2010/main">
-        <p14:section name="Start" id="{741bba2b-6189-2bfd-1d99-e8c7684e7a8e}">
+        <p14:section name="Start" id="{4ccb751f-6c3b-3c72-b0f9-9d355a9126a8}">
           <p14:sldIdLst>
             <p14:sldId id="256"/>
           </p14:sldIdLst>
         </p14:section>
-        <p14:section name="Einstieg" id="{84f65895-d5f3-9de6-c5aa-65e6a0a45495}">
+        <p14:section name="Einstieg" id="{4e91cdc5-dfe2-38bc-86d5-6f214fa0385d}">
           <p14:sldIdLst>
             <p14:sldId id="257"/>
             <p14:sldId id="258"/>
@@ -138,14 +138,14 @@
             <p14:sldId id="262"/>
           </p14:sldIdLst>
         </p14:section>
-        <p14:section name="Erarbeitung" id="{e7b45bc7-e475-eb6d-81ea-92cf7579afc6}">
+        <p14:section name="Erarbeitung" id="{16048960-9e35-4467-86e1-b0e78e7bff11}">
           <p14:sldIdLst>
             <p14:sldId id="263"/>
             <p14:sldId id="264"/>
             <p14:sldId id="265"/>
           </p14:sldIdLst>
         </p14:section>
-        <p14:section name="Übung" id="{7010ab58-fa45-a504-458f-e78d0cf1f64e}">
+        <p14:section name="Übung" id="{4af5f0d3-5284-7ef7-76c9-a9eba8c1dd40}">
           <p14:sldIdLst>
             <p14:sldId id="266"/>
             <p14:sldId id="267"/>
@@ -153,13 +153,13 @@
             <p14:sldId id="269"/>
           </p14:sldIdLst>
         </p14:section>
-        <p14:section name="Sicherung" id="{0645f236-011c-648b-1891-5b215e0969dc}">
+        <p14:section name="Sicherung" id="{dc504023-acce-f973-a57b-476a0fc4bc68}">
           <p14:sldIdLst>
             <p14:sldId id="270"/>
             <p14:sldId id="271"/>
           </p14:sldIdLst>
         </p14:section>
-        <p14:section name="Abschluss" id="{101c827e-3d11-9a9d-4233-7edb90b87a2d}">
+        <p14:section name="Abschluss" id="{ae016662-846b-7390-deaa-b3e1ecabdc33}">
           <p14:sldIdLst>
             <p14:sldId id="272"/>
           </p14:sldIdLst>
@@ -2303,6 +2303,45 @@
       </p:sp>
       <p:sp>
         <p:nvSpPr>
+          <p:cNvPr id="4" name="Text 1"/>
+          <p:cNvSpPr/>
+          <p:nvPr/>
+        </p:nvSpPr>
+        <p:spPr>
+          <a:xfrm>
+            <a:off x="7985455" y="6473952"/>
+            <a:ext cx="2926080" cy="274320"/>
+          </a:xfrm>
+          <a:prstGeom prst="rect">
+            <a:avLst/>
+          </a:prstGeom>
+          <a:noFill/>
+          <a:ln/>
+        </p:spPr>
+        <p:txBody>
+          <a:bodyPr wrap="square" lIns="0" tIns="0" rIns="0" bIns="0" rtlCol="0" anchor="ctr"/>
+          <a:lstStyle/>
+          <a:p>
+            <a:pPr algn="r" indent="0" marL="0">
+              <a:buNone/>
+            </a:pPr>
+            <a:r>
+              <a:rPr lang="en-US" sz="1100" dirty="0">
+                <a:solidFill>
+                  <a:srgbClr val="5B6770"/>
+                </a:solidFill>
+                <a:latin typeface="Calibri" pitchFamily="34" charset="0"/>
+                <a:ea typeface="Calibri" pitchFamily="34" charset="-122"/>
+                <a:cs typeface="Calibri" pitchFamily="34" charset="-120"/>
+              </a:rPr>
+              <a:t>CC BY-SA 4.0 · Frank Juchim</a:t>
+            </a:r>
+            <a:endParaRPr lang="en-US" sz="1100" dirty="0"/>
+          </a:p>
+        </p:txBody>
+      </p:sp>
+      <p:sp>
+        <p:nvSpPr>
           <p:cNvPr id="25" name="Slide Number Placeholder 0"/>
           <p:cNvSpPr>
             <a:spLocks noGrp="1"/>
@@ -2454,6 +2493,45 @@
                 <a:cs typeface="Calibri" pitchFamily="34" charset="-120"/>
               </a:rPr>
               <a:t>Level 14 · Welt C · Formale Sprachen · nur eA (Leistungskurs)</a:t>
+            </a:r>
+            <a:endParaRPr lang="en-US" sz="1100" dirty="0"/>
+          </a:p>
+        </p:txBody>
+      </p:sp>
+      <p:sp>
+        <p:nvSpPr>
+          <p:cNvPr id="4" name="Text 1"/>
+          <p:cNvSpPr/>
+          <p:nvPr/>
+        </p:nvSpPr>
+        <p:spPr>
+          <a:xfrm>
+            <a:off x="7985455" y="6473952"/>
+            <a:ext cx="2926080" cy="274320"/>
+          </a:xfrm>
+          <a:prstGeom prst="rect">
+            <a:avLst/>
+          </a:prstGeom>
+          <a:noFill/>
+          <a:ln/>
+        </p:spPr>
+        <p:txBody>
+          <a:bodyPr wrap="square" lIns="0" tIns="0" rIns="0" bIns="0" rtlCol="0" anchor="ctr"/>
+          <a:lstStyle/>
+          <a:p>
+            <a:pPr algn="r" indent="0" marL="0">
+              <a:buNone/>
+            </a:pPr>
+            <a:r>
+              <a:rPr lang="en-US" sz="1100" dirty="0">
+                <a:solidFill>
+                  <a:srgbClr val="5B6770"/>
+                </a:solidFill>
+                <a:latin typeface="Calibri" pitchFamily="34" charset="0"/>
+                <a:ea typeface="Calibri" pitchFamily="34" charset="-122"/>
+                <a:cs typeface="Calibri" pitchFamily="34" charset="-120"/>
+              </a:rPr>
+              <a:t>CC BY-SA 4.0 · Frank Juchim</a:t>
             </a:r>
             <a:endParaRPr lang="en-US" sz="1100" dirty="0"/>
           </a:p>
